--- a/docs/DentalVision_Presentation.pptx
+++ b/docs/DentalVision_Presentation.pptx
@@ -312,7 +312,7 @@
           <a:p>
             <a:fld id="{5BCAD085-E8A6-8845-BD4E-CB4CCA059FC4}" type="datetimeFigureOut">
               <a:rPr lang="en-US" smtClean="0"/>
-              <a:t>8/26/26</a:t>
+              <a:t>8/27/26</a:t>
             </a:fld>
             <a:endParaRPr lang="en-US"/>
           </a:p>
@@ -480,7 +480,7 @@
           <a:p>
             <a:fld id="{5BCAD085-E8A6-8845-BD4E-CB4CCA059FC4}" type="datetimeFigureOut">
               <a:rPr lang="en-US" smtClean="0"/>
-              <a:t>8/26/26</a:t>
+              <a:t>8/27/26</a:t>
             </a:fld>
             <a:endParaRPr lang="en-US"/>
           </a:p>
@@ -658,7 +658,7 @@
           <a:p>
             <a:fld id="{5BCAD085-E8A6-8845-BD4E-CB4CCA059FC4}" type="datetimeFigureOut">
               <a:rPr lang="en-US" smtClean="0"/>
-              <a:t>8/26/26</a:t>
+              <a:t>8/27/26</a:t>
             </a:fld>
             <a:endParaRPr lang="en-US"/>
           </a:p>
@@ -826,7 +826,7 @@
           <a:p>
             <a:fld id="{5BCAD085-E8A6-8845-BD4E-CB4CCA059FC4}" type="datetimeFigureOut">
               <a:rPr lang="en-US" smtClean="0"/>
-              <a:t>8/26/26</a:t>
+              <a:t>8/27/26</a:t>
             </a:fld>
             <a:endParaRPr lang="en-US"/>
           </a:p>
@@ -1071,7 +1071,7 @@
           <a:p>
             <a:fld id="{5BCAD085-E8A6-8845-BD4E-CB4CCA059FC4}" type="datetimeFigureOut">
               <a:rPr lang="en-US" smtClean="0"/>
-              <a:t>8/26/26</a:t>
+              <a:t>8/27/26</a:t>
             </a:fld>
             <a:endParaRPr lang="en-US"/>
           </a:p>
@@ -1356,7 +1356,7 @@
           <a:p>
             <a:fld id="{5BCAD085-E8A6-8845-BD4E-CB4CCA059FC4}" type="datetimeFigureOut">
               <a:rPr lang="en-US" smtClean="0"/>
-              <a:t>8/26/26</a:t>
+              <a:t>8/27/26</a:t>
             </a:fld>
             <a:endParaRPr lang="en-US"/>
           </a:p>
@@ -1775,7 +1775,7 @@
           <a:p>
             <a:fld id="{5BCAD085-E8A6-8845-BD4E-CB4CCA059FC4}" type="datetimeFigureOut">
               <a:rPr lang="en-US" smtClean="0"/>
-              <a:t>8/26/26</a:t>
+              <a:t>8/27/26</a:t>
             </a:fld>
             <a:endParaRPr lang="en-US"/>
           </a:p>
@@ -1892,7 +1892,7 @@
           <a:p>
             <a:fld id="{5BCAD085-E8A6-8845-BD4E-CB4CCA059FC4}" type="datetimeFigureOut">
               <a:rPr lang="en-US" smtClean="0"/>
-              <a:t>8/26/26</a:t>
+              <a:t>8/27/26</a:t>
             </a:fld>
             <a:endParaRPr lang="en-US"/>
           </a:p>
@@ -1987,7 +1987,7 @@
           <a:p>
             <a:fld id="{5BCAD085-E8A6-8845-BD4E-CB4CCA059FC4}" type="datetimeFigureOut">
               <a:rPr lang="en-US" smtClean="0"/>
-              <a:t>8/26/26</a:t>
+              <a:t>8/27/26</a:t>
             </a:fld>
             <a:endParaRPr lang="en-US"/>
           </a:p>
@@ -2262,7 +2262,7 @@
           <a:p>
             <a:fld id="{5BCAD085-E8A6-8845-BD4E-CB4CCA059FC4}" type="datetimeFigureOut">
               <a:rPr lang="en-US" smtClean="0"/>
-              <a:t>8/26/26</a:t>
+              <a:t>8/27/26</a:t>
             </a:fld>
             <a:endParaRPr lang="en-US"/>
           </a:p>
@@ -2514,7 +2514,7 @@
           <a:p>
             <a:fld id="{5BCAD085-E8A6-8845-BD4E-CB4CCA059FC4}" type="datetimeFigureOut">
               <a:rPr lang="en-US" smtClean="0"/>
-              <a:t>8/26/26</a:t>
+              <a:t>8/27/26</a:t>
             </a:fld>
             <a:endParaRPr lang="en-US"/>
           </a:p>
@@ -2725,7 +2725,7 @@
           <a:p>
             <a:fld id="{5BCAD085-E8A6-8845-BD4E-CB4CCA059FC4}" type="datetimeFigureOut">
               <a:rPr lang="en-US" smtClean="0"/>
-              <a:t>8/26/26</a:t>
+              <a:t>8/27/26</a:t>
             </a:fld>
             <a:endParaRPr lang="en-US"/>
           </a:p>
@@ -10647,7 +10647,13 @@
       </p:sp>
       <p:pic>
         <p:nvPicPr>
-          <p:cNvPr id="23" name="Picture 22" descr="Screenshot 2026-08-26 at 12.57.18 PM(1).png"/>
+          <p:cNvPr id="24" name="Picture 23">
+            <a:extLst>
+              <a:ext uri="{FF2B5EF4-FFF2-40B4-BE49-F238E27FC236}">
+                <a16:creationId xmlns:a16="http://schemas.microsoft.com/office/drawing/2014/main" id="{DB919EBA-2AA7-FED9-F64F-6FFDDB48D244}"/>
+              </a:ext>
+            </a:extLst>
+          </p:cNvPr>
           <p:cNvPicPr>
             <a:picLocks noChangeAspect="1"/>
           </p:cNvPicPr>
@@ -10661,8 +10667,8 @@
         </p:blipFill>
         <p:spPr>
           <a:xfrm>
-            <a:off x="6446520" y="3657600"/>
-            <a:ext cx="4572000" cy="2752609"/>
+            <a:off x="6670040" y="3657600"/>
+            <a:ext cx="4851400" cy="2661544"/>
           </a:xfrm>
           <a:prstGeom prst="rect">
             <a:avLst/>
